--- a/scenarios/S10_election_office_support/deliverables/선관위_업무브리핑_덱.pptx
+++ b/scenarios/S10_election_office_support/deliverables/선관위_업무브리핑_덱.pptx
@@ -13,6 +13,7 @@
     <p:sldId id="261" r:id="rId12"/>
     <p:sldId id="262" r:id="rId13"/>
     <p:sldId id="263" r:id="rId14"/>
+    <p:sldId id="264" r:id="rId15"/>
   </p:sldIdLst>
   <p:sldSz cx="9144000" cy="6858000" type="screen4x3"/>
   <p:notesSz cx="6858000" cy="9144000"/>
@@ -3638,6 +3639,90 @@
           <a:p>
             <a:r>
               <a:t>외부반출 사전승인 필수</a:t>
+            </a:r>
+          </a:p>
+        </p:txBody>
+      </p:sp>
+    </p:spTree>
+  </p:cSld>
+  <p:clrMapOvr>
+    <a:masterClrMapping/>
+  </p:clrMapOvr>
+</p:sld>
+</file>
+
+<file path=ppt/slides/slide9.xml><?xml version="1.0" encoding="utf-8"?>
+<p:sld xmlns:a="http://schemas.openxmlformats.org/drawingml/2006/main" xmlns:p="http://schemas.openxmlformats.org/presentationml/2006/main" xmlns:r="http://schemas.openxmlformats.org/officeDocument/2006/relationships">
+  <p:cSld>
+    <p:spTree>
+      <p:nvGrpSpPr>
+        <p:cNvPr id="1" name=""/>
+        <p:cNvGrpSpPr/>
+        <p:nvPr/>
+      </p:nvGrpSpPr>
+      <p:grpSpPr/>
+      <p:sp>
+        <p:nvSpPr>
+          <p:cNvPr id="2" name="Title 1"/>
+          <p:cNvSpPr>
+            <a:spLocks noGrp="1"/>
+          </p:cNvSpPr>
+          <p:nvPr>
+            <p:ph type="title"/>
+          </p:nvPr>
+        </p:nvSpPr>
+        <p:spPr/>
+        <p:txBody>
+          <a:bodyPr/>
+          <a:lstStyle/>
+          <a:p>
+            <a:r>
+              <a:t>변경 이력: 선거 지원 절차 및 에스컬레이션 기준</a:t>
+            </a:r>
+          </a:p>
+        </p:txBody>
+      </p:sp>
+      <p:sp>
+        <p:nvSpPr>
+          <p:cNvPr id="3" name="Content Placeholder 2"/>
+          <p:cNvSpPr>
+            <a:spLocks noGrp="1"/>
+          </p:cNvSpPr>
+          <p:nvPr>
+            <p:ph idx="1"/>
+          </p:nvPr>
+        </p:nvSpPr>
+        <p:spPr/>
+        <p:txBody>
+          <a:bodyPr/>
+          <a:lstStyle/>
+          <a:p>
+            <a:r>
+              <a:t>관리계 선거비용 실사 보조 범위·절차·역할·기록·보고 기준 문서화</a:t>
+            </a:r>
+          </a:p>
+          <a:p>
+            <a:pPr>
+              <a:defRPr sz="1400"/>
+            </a:pPr>
+            <a:r>
+              <a:t>지도계 민원 접수·분류·답변 및 유권해석 에스컬레이션 기준 문서화</a:t>
+            </a:r>
+          </a:p>
+          <a:p>
+            <a:pPr>
+              <a:defRPr sz="1400"/>
+            </a:pPr>
+            <a:r>
+              <a:t>관리계·지도계 업무 인계·협업·기록 공유 기준 정리</a:t>
+            </a:r>
+          </a:p>
+          <a:p>
+            <a:pPr>
+              <a:defRPr sz="1400"/>
+            </a:pPr>
+            <a:r>
+              <a:t>최종 승인권자·보고 기준, 에스컬레이션 SLA, 보존기간·접근권한은 후속 확정</a:t>
             </a:r>
           </a:p>
         </p:txBody>

--- a/scenarios/S10_election_office_support/deliverables/선관위_업무브리핑_덱.pptx
+++ b/scenarios/S10_election_office_support/deliverables/선관위_업무브리핑_덱.pptx
@@ -14,6 +14,7 @@
     <p:sldId id="262" r:id="rId13"/>
     <p:sldId id="263" r:id="rId14"/>
     <p:sldId id="264" r:id="rId15"/>
+    <p:sldId id="265" r:id="rId16"/>
   </p:sldIdLst>
   <p:sldSz cx="9144000" cy="6858000" type="screen4x3"/>
   <p:notesSz cx="6858000" cy="9144000"/>
@@ -3146,6 +3147,90 @@
 </p:sld>
 </file>
 
+<file path=ppt/slides/slide10.xml><?xml version="1.0" encoding="utf-8"?>
+<p:sld xmlns:a="http://schemas.openxmlformats.org/drawingml/2006/main" xmlns:p="http://schemas.openxmlformats.org/presentationml/2006/main" xmlns:r="http://schemas.openxmlformats.org/officeDocument/2006/relationships">
+  <p:cSld>
+    <p:spTree>
+      <p:nvGrpSpPr>
+        <p:cNvPr id="1" name=""/>
+        <p:cNvGrpSpPr/>
+        <p:nvPr/>
+      </p:nvGrpSpPr>
+      <p:grpSpPr/>
+      <p:sp>
+        <p:nvSpPr>
+          <p:cNvPr id="2" name="Title 1"/>
+          <p:cNvSpPr>
+            <a:spLocks noGrp="1"/>
+          </p:cNvSpPr>
+          <p:nvPr>
+            <p:ph type="title"/>
+          </p:nvPr>
+        </p:nvSpPr>
+        <p:spPr/>
+        <p:txBody>
+          <a:bodyPr/>
+          <a:lstStyle/>
+          <a:p>
+            <a:r>
+              <a:t>변경 이력: 승인 페이로드 반영</a:t>
+            </a:r>
+          </a:p>
+        </p:txBody>
+      </p:sp>
+      <p:sp>
+        <p:nvSpPr>
+          <p:cNvPr id="3" name="Content Placeholder 2"/>
+          <p:cNvSpPr>
+            <a:spLocks noGrp="1"/>
+          </p:cNvSpPr>
+          <p:nvPr>
+            <p:ph idx="1"/>
+          </p:nvPr>
+        </p:nvSpPr>
+        <p:spPr/>
+        <p:txBody>
+          <a:bodyPr/>
+          <a:lstStyle/>
+          <a:p>
+            <a:r>
+              <a:t>관리계 선거비용 실사 보조 범위·절차·역할·기록·보고 기준을 문서화</a:t>
+            </a:r>
+          </a:p>
+          <a:p>
+            <a:pPr>
+              <a:defRPr sz="1400"/>
+            </a:pPr>
+            <a:r>
+              <a:t>지도계 민원 접수·분류·답변 및 유권해석 에스컬레이션 기준을 문서화</a:t>
+            </a:r>
+          </a:p>
+          <a:p>
+            <a:pPr>
+              <a:defRPr sz="1400"/>
+            </a:pPr>
+            <a:r>
+              <a:t>관리계·지도계 업무 인계·협업·기록 공유 및 개인정보·민감정보 통제를 반영</a:t>
+            </a:r>
+          </a:p>
+          <a:p>
+            <a:pPr>
+              <a:defRPr sz="1400"/>
+            </a:pPr>
+            <a:r>
+              <a:t>최종 승인권자·법적 근거·RACI·SLA·보존기간·접근권한·대외 답변 품질관리 책임은 후속 확정</a:t>
+            </a:r>
+          </a:p>
+        </p:txBody>
+      </p:sp>
+    </p:spTree>
+  </p:cSld>
+  <p:clrMapOvr>
+    <a:masterClrMapping/>
+  </p:clrMapOvr>
+</p:sld>
+</file>
+
 <file path=ppt/slides/slide2.xml><?xml version="1.0" encoding="utf-8"?>
 <p:sld xmlns:a="http://schemas.openxmlformats.org/drawingml/2006/main" xmlns:p="http://schemas.openxmlformats.org/presentationml/2006/main" xmlns:r="http://schemas.openxmlformats.org/officeDocument/2006/relationships">
   <p:cSld>
@@ -3493,7 +3578,7 @@
           </a:p>
           <a:p>
             <a:r>
-              <a:t>2영업일 이내 요청 원칙</a:t>
+              <a:t>에스컬레이션 접수처·승인권자·목표 처리시간(SLA)은 후속 확정</a:t>
             </a:r>
           </a:p>
           <a:p>
@@ -3563,7 +3648,7 @@
           </a:p>
           <a:p>
             <a:r>
-              <a:t>주간 처리현황 보고</a:t>
+              <a:t>보고 기준 및 최종 승인권자는 후속 확정</a:t>
             </a:r>
           </a:p>
           <a:p>

--- a/scenarios/S10_election_office_support/deliverables/선관위_업무브리핑_덱.pptx
+++ b/scenarios/S10_election_office_support/deliverables/선관위_업무브리핑_덱.pptx
@@ -15,6 +15,7 @@
     <p:sldId id="263" r:id="rId14"/>
     <p:sldId id="264" r:id="rId15"/>
     <p:sldId id="265" r:id="rId16"/>
+    <p:sldId id="266" r:id="rId17"/>
   </p:sldIdLst>
   <p:sldSz cx="9144000" cy="6858000" type="screen4x3"/>
   <p:notesSz cx="6858000" cy="9144000"/>
@@ -3219,6 +3220,98 @@
             </a:pPr>
             <a:r>
               <a:t>최종 승인권자·법적 근거·RACI·SLA·보존기간·접근권한·대외 답변 품질관리 책임은 후속 확정</a:t>
+            </a:r>
+          </a:p>
+        </p:txBody>
+      </p:sp>
+    </p:spTree>
+  </p:cSld>
+  <p:clrMapOvr>
+    <a:masterClrMapping/>
+  </p:clrMapOvr>
+</p:sld>
+</file>
+
+<file path=ppt/slides/slide11.xml><?xml version="1.0" encoding="utf-8"?>
+<p:sld xmlns:a="http://schemas.openxmlformats.org/drawingml/2006/main" xmlns:p="http://schemas.openxmlformats.org/presentationml/2006/main" xmlns:r="http://schemas.openxmlformats.org/officeDocument/2006/relationships">
+  <p:cSld>
+    <p:spTree>
+      <p:nvGrpSpPr>
+        <p:cNvPr id="1" name=""/>
+        <p:cNvGrpSpPr/>
+        <p:nvPr/>
+      </p:nvGrpSpPr>
+      <p:grpSpPr/>
+      <p:sp>
+        <p:nvSpPr>
+          <p:cNvPr id="2" name="Title 1"/>
+          <p:cNvSpPr>
+            <a:spLocks noGrp="1"/>
+          </p:cNvSpPr>
+          <p:nvPr>
+            <p:ph type="title"/>
+          </p:nvPr>
+        </p:nvSpPr>
+        <p:spPr/>
+        <p:txBody>
+          <a:bodyPr/>
+          <a:lstStyle/>
+          <a:p>
+            <a:r>
+              <a:t>변경 이력: 3일 처리 원칙 및 협업 기준 반영</a:t>
+            </a:r>
+          </a:p>
+        </p:txBody>
+      </p:sp>
+      <p:sp>
+        <p:nvSpPr>
+          <p:cNvPr id="3" name="Content Placeholder 2"/>
+          <p:cNvSpPr>
+            <a:spLocks noGrp="1"/>
+          </p:cNvSpPr>
+          <p:nvPr>
+            <p:ph idx="1"/>
+          </p:nvPr>
+        </p:nvSpPr>
+        <p:spPr/>
+        <p:txBody>
+          <a:bodyPr/>
+          <a:lstStyle/>
+          <a:p>
+            <a:r>
+              <a:t>관리계 선거비용 실사 보조 업무의 범위·절차·역할·기록·보고 기준과 공식 판단·조치의 권한 경계를 명시</a:t>
+            </a:r>
+          </a:p>
+          <a:p>
+            <a:pPr>
+              <a:defRPr sz="1400"/>
+            </a:pPr>
+            <a:r>
+              <a:t>지도계 민원 접수·분류·답변 및 유권해석 에스컬레이션 기준에 현수막 규격·기부행위 해당여부 문의를 반영</a:t>
+            </a:r>
+          </a:p>
+          <a:p>
+            <a:pPr>
+              <a:defRPr sz="1400"/>
+            </a:pPr>
+            <a:r>
+              <a:t>현수막 규격·기부행위 해당여부 문의에 3일 처리 원칙 적용</a:t>
+            </a:r>
+          </a:p>
+          <a:p>
+            <a:pPr>
+              <a:defRPr sz="1400"/>
+            </a:pPr>
+            <a:r>
+              <a:t>관리계·지도계 업무 인계·협업·기록 공유·책임 분담 및 개인정보·민감정보 통제 반영</a:t>
+            </a:r>
+          </a:p>
+          <a:p>
+            <a:pPr>
+              <a:defRPr sz="1400"/>
+            </a:pPr>
+            <a:r>
+              <a:t>최종 승인권자·공식 접수처·SLA·법적 근거·RACI·보존기간·접근권한·대외 답변 품질관리 책임은 후속 확정</a:t>
             </a:r>
           </a:p>
         </p:txBody>

--- a/scenarios/S10_election_office_support/deliverables/선관위_업무브리핑_덱.pptx
+++ b/scenarios/S10_election_office_support/deliverables/선관위_업무브리핑_덱.pptx
@@ -16,6 +16,7 @@
     <p:sldId id="264" r:id="rId15"/>
     <p:sldId id="265" r:id="rId16"/>
     <p:sldId id="266" r:id="rId17"/>
+    <p:sldId id="267" r:id="rId18"/>
   </p:sldIdLst>
   <p:sldSz cx="9144000" cy="6858000" type="screen4x3"/>
   <p:notesSz cx="6858000" cy="9144000"/>
@@ -3312,6 +3313,90 @@
             </a:pPr>
             <a:r>
               <a:t>최종 승인권자·공식 접수처·SLA·법적 근거·RACI·보존기간·접근권한·대외 답변 품질관리 책임은 후속 확정</a:t>
+            </a:r>
+          </a:p>
+        </p:txBody>
+      </p:sp>
+    </p:spTree>
+  </p:cSld>
+  <p:clrMapOvr>
+    <a:masterClrMapping/>
+  </p:clrMapOvr>
+</p:sld>
+</file>
+
+<file path=ppt/slides/slide12.xml><?xml version="1.0" encoding="utf-8"?>
+<p:sld xmlns:a="http://schemas.openxmlformats.org/drawingml/2006/main" xmlns:p="http://schemas.openxmlformats.org/presentationml/2006/main" xmlns:r="http://schemas.openxmlformats.org/officeDocument/2006/relationships">
+  <p:cSld>
+    <p:spTree>
+      <p:nvGrpSpPr>
+        <p:cNvPr id="1" name=""/>
+        <p:cNvGrpSpPr/>
+        <p:nvPr/>
+      </p:nvGrpSpPr>
+      <p:grpSpPr/>
+      <p:sp>
+        <p:nvSpPr>
+          <p:cNvPr id="2" name="Title 1"/>
+          <p:cNvSpPr>
+            <a:spLocks noGrp="1"/>
+          </p:cNvSpPr>
+          <p:nvPr>
+            <p:ph type="title"/>
+          </p:nvPr>
+        </p:nvSpPr>
+        <p:spPr/>
+        <p:txBody>
+          <a:bodyPr/>
+          <a:lstStyle/>
+          <a:p>
+            <a:r>
+              <a:t>변경 이력: 승인 페이로드 실행 반영</a:t>
+            </a:r>
+          </a:p>
+        </p:txBody>
+      </p:sp>
+      <p:sp>
+        <p:nvSpPr>
+          <p:cNvPr id="3" name="Content Placeholder 2"/>
+          <p:cNvSpPr>
+            <a:spLocks noGrp="1"/>
+          </p:cNvSpPr>
+          <p:nvPr>
+            <p:ph idx="1"/>
+          </p:nvPr>
+        </p:nvSpPr>
+        <p:spPr/>
+        <p:txBody>
+          <a:bodyPr/>
+          <a:lstStyle/>
+          <a:p>
+            <a:r>
+              <a:t>관리계 선거비용 실사 보조 범위·절차·역할·기록·보고 기준과 공식 판단·조치의 권한 경계를 반영</a:t>
+            </a:r>
+          </a:p>
+          <a:p>
+            <a:pPr>
+              <a:defRPr sz="1400"/>
+            </a:pPr>
+            <a:r>
+              <a:t>지도계 민원 대응 및 유권해석 에스컬레이션 기준에 현수막 규격·기부행위 해당 여부 문의를 반영</a:t>
+            </a:r>
+          </a:p>
+          <a:p>
+            <a:pPr>
+              <a:defRPr sz="1400"/>
+            </a:pPr>
+            <a:r>
+              <a:t>민원 처리 3일 원칙과 관리계·지도계 인계·협업·기록 공유·개인정보 통제를 반영</a:t>
+            </a:r>
+          </a:p>
+          <a:p>
+            <a:pPr>
+              <a:defRPr sz="1400"/>
+            </a:pPr>
+            <a:r>
+              <a:t>최종 승인권자·법적 근거·RACI·SLA·보존기간·접근권한·대외 답변 품질관리 책임은 후속 확정 및 시행 전 검증 대상으로 유지</a:t>
             </a:r>
           </a:p>
         </p:txBody>

--- a/scenarios/S10_election_office_support/deliverables/선관위_업무브리핑_덱.pptx
+++ b/scenarios/S10_election_office_support/deliverables/선관위_업무브리핑_덱.pptx
@@ -17,6 +17,7 @@
     <p:sldId id="265" r:id="rId16"/>
     <p:sldId id="266" r:id="rId17"/>
     <p:sldId id="267" r:id="rId18"/>
+    <p:sldId id="268" r:id="rId19"/>
   </p:sldIdLst>
   <p:sldSz cx="9144000" cy="6858000" type="screen4x3"/>
   <p:notesSz cx="6858000" cy="9144000"/>
@@ -3397,6 +3398,98 @@
             </a:pPr>
             <a:r>
               <a:t>최종 승인권자·법적 근거·RACI·SLA·보존기간·접근권한·대외 답변 품질관리 책임은 후속 확정 및 시행 전 검증 대상으로 유지</a:t>
+            </a:r>
+          </a:p>
+        </p:txBody>
+      </p:sp>
+    </p:spTree>
+  </p:cSld>
+  <p:clrMapOvr>
+    <a:masterClrMapping/>
+  </p:clrMapOvr>
+</p:sld>
+</file>
+
+<file path=ppt/slides/slide13.xml><?xml version="1.0" encoding="utf-8"?>
+<p:sld xmlns:a="http://schemas.openxmlformats.org/drawingml/2006/main" xmlns:p="http://schemas.openxmlformats.org/presentationml/2006/main" xmlns:r="http://schemas.openxmlformats.org/officeDocument/2006/relationships">
+  <p:cSld>
+    <p:spTree>
+      <p:nvGrpSpPr>
+        <p:cNvPr id="1" name=""/>
+        <p:cNvGrpSpPr/>
+        <p:nvPr/>
+      </p:nvGrpSpPr>
+      <p:grpSpPr/>
+      <p:sp>
+        <p:nvSpPr>
+          <p:cNvPr id="2" name="Title 1"/>
+          <p:cNvSpPr>
+            <a:spLocks noGrp="1"/>
+          </p:cNvSpPr>
+          <p:nvPr>
+            <p:ph type="title"/>
+          </p:nvPr>
+        </p:nvSpPr>
+        <p:spPr/>
+        <p:txBody>
+          <a:bodyPr/>
+          <a:lstStyle/>
+          <a:p>
+            <a:r>
+              <a:t>변경 이력: 승인 페이로드 확인 및 후속 확정사항</a:t>
+            </a:r>
+          </a:p>
+        </p:txBody>
+      </p:sp>
+      <p:sp>
+        <p:nvSpPr>
+          <p:cNvPr id="3" name="Content Placeholder 2"/>
+          <p:cNvSpPr>
+            <a:spLocks noGrp="1"/>
+          </p:cNvSpPr>
+          <p:nvPr>
+            <p:ph idx="1"/>
+          </p:nvPr>
+        </p:nvSpPr>
+        <p:spPr/>
+        <p:txBody>
+          <a:bodyPr/>
+          <a:lstStyle/>
+          <a:p>
+            <a:r>
+              <a:t>관리계 선거비용 실사 보조 범위·처리 절차·역할·권한 경계·기록·보고 기준을 반영</a:t>
+            </a:r>
+          </a:p>
+          <a:p>
+            <a:pPr>
+              <a:defRPr sz="1400"/>
+            </a:pPr>
+            <a:r>
+              <a:t>지도계 민원 접수·분류·답변 및 유권해석 에스컬레이션 기준과 현수막 규격·기부행위 해당 여부 문의를 반영</a:t>
+            </a:r>
+          </a:p>
+          <a:p>
+            <a:pPr>
+              <a:defRPr sz="1400"/>
+            </a:pPr>
+            <a:r>
+              <a:t>관리계·지도계 인계·협업·기록 공유·책임 분담 및 개인정보·민감정보 통제를 반영</a:t>
+            </a:r>
+          </a:p>
+          <a:p>
+            <a:pPr>
+              <a:defRPr sz="1400"/>
+            </a:pPr>
+            <a:r>
+              <a:t>처리기한 3일 원칙과 관련 요구사항·결정 사항의 산출물 추적성을 반영</a:t>
+            </a:r>
+          </a:p>
+          <a:p>
+            <a:pPr>
+              <a:defRPr sz="1400"/>
+            </a:pPr>
+            <a:r>
+              <a:t>승인권자·법적 근거·RACI·SLA·보존기간·접근권한·대외 답변 품질관리 책임 및 시행 전 일관성 검증은 후속 확정·검증 대상으로 유지</a:t>
             </a:r>
           </a:p>
         </p:txBody>

--- a/scenarios/S10_election_office_support/deliverables/선관위_업무브리핑_덱.pptx
+++ b/scenarios/S10_election_office_support/deliverables/선관위_업무브리핑_덱.pptx
@@ -18,6 +18,7 @@
     <p:sldId id="266" r:id="rId17"/>
     <p:sldId id="267" r:id="rId18"/>
     <p:sldId id="268" r:id="rId19"/>
+    <p:sldId id="269" r:id="rId20"/>
   </p:sldIdLst>
   <p:sldSz cx="9144000" cy="6858000" type="screen4x3"/>
   <p:notesSz cx="6858000" cy="9144000"/>
@@ -3502,6 +3503,98 @@
 </p:sld>
 </file>
 
+<file path=ppt/slides/slide14.xml><?xml version="1.0" encoding="utf-8"?>
+<p:sld xmlns:a="http://schemas.openxmlformats.org/drawingml/2006/main" xmlns:p="http://schemas.openxmlformats.org/presentationml/2006/main" xmlns:r="http://schemas.openxmlformats.org/officeDocument/2006/relationships">
+  <p:cSld>
+    <p:spTree>
+      <p:nvGrpSpPr>
+        <p:cNvPr id="1" name=""/>
+        <p:cNvGrpSpPr/>
+        <p:nvPr/>
+      </p:nvGrpSpPr>
+      <p:grpSpPr/>
+      <p:sp>
+        <p:nvSpPr>
+          <p:cNvPr id="2" name="Title 1"/>
+          <p:cNvSpPr>
+            <a:spLocks noGrp="1"/>
+          </p:cNvSpPr>
+          <p:nvPr>
+            <p:ph type="title"/>
+          </p:nvPr>
+        </p:nvSpPr>
+        <p:spPr/>
+        <p:txBody>
+          <a:bodyPr/>
+          <a:lstStyle/>
+          <a:p>
+            <a:r>
+              <a:t>변경 이력: 승인 페이로드 실행 결과 반영</a:t>
+            </a:r>
+          </a:p>
+        </p:txBody>
+      </p:sp>
+      <p:sp>
+        <p:nvSpPr>
+          <p:cNvPr id="3" name="Content Placeholder 2"/>
+          <p:cNvSpPr>
+            <a:spLocks noGrp="1"/>
+          </p:cNvSpPr>
+          <p:nvPr>
+            <p:ph idx="1"/>
+          </p:nvPr>
+        </p:nvSpPr>
+        <p:spPr/>
+        <p:txBody>
+          <a:bodyPr/>
+          <a:lstStyle/>
+          <a:p>
+            <a:r>
+              <a:t>신규 절차서 3종과 팀 채널 공지문 초안을 추가하고 통합 산출물 3종을 수정</a:t>
+            </a:r>
+          </a:p>
+          <a:p>
+            <a:pPr>
+              <a:defRPr sz="1400"/>
+            </a:pPr>
+            <a:r>
+              <a:t>관리계 실사 보조와 공식 판단·조치의 최종 판단·승인 주체를 구분</a:t>
+            </a:r>
+          </a:p>
+          <a:p>
+            <a:pPr>
+              <a:defRPr sz="1400"/>
+            </a:pPr>
+            <a:r>
+              <a:t>지도계 민원 대응·유권해석 에스컬레이션에 현수막 규격·기부행위 해당 여부 문의를 반영</a:t>
+            </a:r>
+          </a:p>
+          <a:p>
+            <a:pPr>
+              <a:defRPr sz="1400"/>
+            </a:pPr>
+            <a:r>
+              <a:t>처리기한 3일 원칙, 관리계·지도계 인계·기록 공유·개인정보 통제 및 요구사항·결정 사항·산출물 추적성을 반영</a:t>
+            </a:r>
+          </a:p>
+          <a:p>
+            <a:pPr>
+              <a:defRPr sz="1400"/>
+            </a:pPr>
+            <a:r>
+              <a:t>승인권자·법적 근거·공식 접수처·SLA·RACI·정보보호 통제 및 시행 전 일관성 검증은 후속 확정·검증 대상으로 유지</a:t>
+            </a:r>
+          </a:p>
+        </p:txBody>
+      </p:sp>
+    </p:spTree>
+  </p:cSld>
+  <p:clrMapOvr>
+    <a:masterClrMapping/>
+  </p:clrMapOvr>
+</p:sld>
+</file>
+
 <file path=ppt/slides/slide2.xml><?xml version="1.0" encoding="utf-8"?>
 <p:sld xmlns:a="http://schemas.openxmlformats.org/drawingml/2006/main" xmlns:p="http://schemas.openxmlformats.org/presentationml/2006/main" xmlns:r="http://schemas.openxmlformats.org/officeDocument/2006/relationships">
   <p:cSld>
@@ -3914,7 +4007,7 @@
           <a:lstStyle/>
           <a:p>
             <a:r>
-              <a:t>일반민원 7일, 법령해석 14일</a:t>
+              <a:t>처리기한 3일 원칙 적용, 일반민원 7일·법령해석 14일 기준 병행</a:t>
             </a:r>
           </a:p>
           <a:p>
